--- a/brand/flex-deck-template.pptx
+++ b/brand/flex-deck-template.pptx
@@ -111,27 +111,27 @@
   <p:extLst>
     <p:ext uri="{521415D9-36F7-43E2-AB2F-B90AF26B5E84}">
       <p14:sectionLst xmlns:p14="http://schemas.microsoft.com/office/powerpoint/2010/main">
-        <p14:section name="Cover" id="{5b375dcf-6043-aad1-27a9-300b2936c3ad}">
+        <p14:section name="Cover" id="{fae0b126-b1a0-4eb7-d0d4-2132d57dc0a4}">
           <p14:sldIdLst>
             <p14:sldId id="256"/>
           </p14:sldIdLst>
         </p14:section>
-        <p14:section name="Divider" id="{46612abb-4396-d6bf-1e64-beaade4f1645}">
+        <p14:section name="Divider" id="{8099fcc4-d329-8f66-39ae-b5014c362ecb}">
           <p14:sldIdLst>
             <p14:sldId id="257"/>
           </p14:sldIdLst>
         </p14:section>
-        <p14:section name="Content" id="{0f0a554d-326a-61d8-a0c3-0c767899cc3f}">
+        <p14:section name="Content" id="{8b9e485f-5572-ee80-0692-eac53493a1e5}">
           <p14:sldIdLst>
             <p14:sldId id="258"/>
           </p14:sldIdLst>
         </p14:section>
-        <p14:section name="Numbers" id="{1a8910fa-a4af-9119-715d-e2cf5a15e49c}">
+        <p14:section name="Numbers" id="{468e3b5e-21ef-1445-bf10-d3840c506da1}">
           <p14:sldIdLst>
             <p14:sldId id="259"/>
           </p14:sldIdLst>
         </p14:section>
-        <p14:section name="Close" id="{8cf2d38e-889f-c6c9-bced-2f02fe6e346f}">
+        <p14:section name="Close" id="{d6734dca-f5e5-cdac-6b16-11b8fb5dc9ad}">
           <p14:sldIdLst>
             <p14:sldId id="260"/>
           </p14:sldIdLst>
@@ -1005,7 +1005,7 @@
         <p:spPr>
           <a:xfrm>
             <a:off x="658368" y="548640"/>
-            <a:ext cx="2292401" cy="726948"/>
+            <a:ext cx="2104949" cy="726948"/>
           </a:xfrm>
           <a:prstGeom prst="rect">
             <a:avLst/>
@@ -1276,7 +1276,7 @@
         <p:spPr>
           <a:xfrm>
             <a:off x="10332720" y="5852160"/>
-            <a:ext cx="1294790" cy="410566"/>
+            <a:ext cx="1188720" cy="410566"/>
           </a:xfrm>
           <a:prstGeom prst="rect">
             <a:avLst/>
@@ -1430,7 +1430,7 @@
         <p:spPr>
           <a:xfrm>
             <a:off x="10716768" y="6053328"/>
-            <a:ext cx="946404" cy="299923"/>
+            <a:ext cx="868680" cy="299923"/>
           </a:xfrm>
           <a:prstGeom prst="rect">
             <a:avLst/>
@@ -1564,7 +1564,7 @@
         <p:spPr>
           <a:xfrm>
             <a:off x="10716768" y="6053328"/>
-            <a:ext cx="946404" cy="299923"/>
+            <a:ext cx="868680" cy="299923"/>
           </a:xfrm>
           <a:prstGeom prst="rect">
             <a:avLst/>
@@ -1737,7 +1737,7 @@
         <p:spPr>
           <a:xfrm>
             <a:off x="10332720" y="5760720"/>
-            <a:ext cx="1294790" cy="410566"/>
+            <a:ext cx="1188720" cy="410566"/>
           </a:xfrm>
           <a:prstGeom prst="rect">
             <a:avLst/>
